--- a/대기행렬/예측관리 데이터 전처리 과정(Xovis 활용)_v1.2_260909.pptx
+++ b/대기행렬/예측관리 데이터 전처리 과정(Xovis 활용)_v1.2_260909.pptx
@@ -261,7 +261,7 @@
           <a:p>
             <a:fld id="{A1AF11A8-AD3C-42A3-847F-ACACF296C852}" type="datetimeFigureOut">
               <a:rPr lang="ko-KR" altLang="en-US" smtClean="0"/>
-              <a:t>2026-09-09</a:t>
+              <a:t>2026-10-09</a:t>
             </a:fld>
             <a:endParaRPr lang="ko-KR" altLang="en-US"/>
           </a:p>
@@ -431,7 +431,7 @@
           <a:p>
             <a:fld id="{A1AF11A8-AD3C-42A3-847F-ACACF296C852}" type="datetimeFigureOut">
               <a:rPr lang="ko-KR" altLang="en-US" smtClean="0"/>
-              <a:t>2026-09-09</a:t>
+              <a:t>2026-10-09</a:t>
             </a:fld>
             <a:endParaRPr lang="ko-KR" altLang="en-US"/>
           </a:p>
@@ -611,7 +611,7 @@
           <a:p>
             <a:fld id="{A1AF11A8-AD3C-42A3-847F-ACACF296C852}" type="datetimeFigureOut">
               <a:rPr lang="ko-KR" altLang="en-US" smtClean="0"/>
-              <a:t>2026-09-09</a:t>
+              <a:t>2026-10-09</a:t>
             </a:fld>
             <a:endParaRPr lang="ko-KR" altLang="en-US"/>
           </a:p>
@@ -781,7 +781,7 @@
           <a:p>
             <a:fld id="{A1AF11A8-AD3C-42A3-847F-ACACF296C852}" type="datetimeFigureOut">
               <a:rPr lang="ko-KR" altLang="en-US" smtClean="0"/>
-              <a:t>2026-09-09</a:t>
+              <a:t>2026-10-09</a:t>
             </a:fld>
             <a:endParaRPr lang="ko-KR" altLang="en-US"/>
           </a:p>
@@ -1025,7 +1025,7 @@
           <a:p>
             <a:fld id="{A1AF11A8-AD3C-42A3-847F-ACACF296C852}" type="datetimeFigureOut">
               <a:rPr lang="ko-KR" altLang="en-US" smtClean="0"/>
-              <a:t>2026-09-09</a:t>
+              <a:t>2026-10-09</a:t>
             </a:fld>
             <a:endParaRPr lang="ko-KR" altLang="en-US"/>
           </a:p>
@@ -1257,7 +1257,7 @@
           <a:p>
             <a:fld id="{A1AF11A8-AD3C-42A3-847F-ACACF296C852}" type="datetimeFigureOut">
               <a:rPr lang="ko-KR" altLang="en-US" smtClean="0"/>
-              <a:t>2026-09-09</a:t>
+              <a:t>2026-10-09</a:t>
             </a:fld>
             <a:endParaRPr lang="ko-KR" altLang="en-US"/>
           </a:p>
@@ -1624,7 +1624,7 @@
           <a:p>
             <a:fld id="{A1AF11A8-AD3C-42A3-847F-ACACF296C852}" type="datetimeFigureOut">
               <a:rPr lang="ko-KR" altLang="en-US" smtClean="0"/>
-              <a:t>2026-09-09</a:t>
+              <a:t>2026-10-09</a:t>
             </a:fld>
             <a:endParaRPr lang="ko-KR" altLang="en-US"/>
           </a:p>
@@ -1742,7 +1742,7 @@
           <a:p>
             <a:fld id="{A1AF11A8-AD3C-42A3-847F-ACACF296C852}" type="datetimeFigureOut">
               <a:rPr lang="ko-KR" altLang="en-US" smtClean="0"/>
-              <a:t>2026-09-09</a:t>
+              <a:t>2026-10-09</a:t>
             </a:fld>
             <a:endParaRPr lang="ko-KR" altLang="en-US"/>
           </a:p>
@@ -1837,7 +1837,7 @@
           <a:p>
             <a:fld id="{A1AF11A8-AD3C-42A3-847F-ACACF296C852}" type="datetimeFigureOut">
               <a:rPr lang="ko-KR" altLang="en-US" smtClean="0"/>
-              <a:t>2026-09-09</a:t>
+              <a:t>2026-10-09</a:t>
             </a:fld>
             <a:endParaRPr lang="ko-KR" altLang="en-US"/>
           </a:p>
@@ -2114,7 +2114,7 @@
           <a:p>
             <a:fld id="{A1AF11A8-AD3C-42A3-847F-ACACF296C852}" type="datetimeFigureOut">
               <a:rPr lang="ko-KR" altLang="en-US" smtClean="0"/>
-              <a:t>2026-09-09</a:t>
+              <a:t>2026-10-09</a:t>
             </a:fld>
             <a:endParaRPr lang="ko-KR" altLang="en-US"/>
           </a:p>
@@ -2371,7 +2371,7 @@
           <a:p>
             <a:fld id="{A1AF11A8-AD3C-42A3-847F-ACACF296C852}" type="datetimeFigureOut">
               <a:rPr lang="ko-KR" altLang="en-US" smtClean="0"/>
-              <a:t>2026-09-09</a:t>
+              <a:t>2026-10-09</a:t>
             </a:fld>
             <a:endParaRPr lang="ko-KR" altLang="en-US"/>
           </a:p>
@@ -2584,7 +2584,7 @@
           <a:p>
             <a:fld id="{A1AF11A8-AD3C-42A3-847F-ACACF296C852}" type="datetimeFigureOut">
               <a:rPr lang="ko-KR" altLang="en-US" smtClean="0"/>
-              <a:t>2026-09-09</a:t>
+              <a:t>2026-10-09</a:t>
             </a:fld>
             <a:endParaRPr lang="ko-KR" altLang="en-US"/>
           </a:p>
@@ -8394,12 +8394,12 @@
               <a:t>인원</a:t>
             </a:r>
             <a:r>
-              <a:rPr lang="en-US" altLang="ko-KR" dirty="0">
-                <a:solidFill>
-                  <a:schemeClr val="tx1"/>
-                </a:solidFill>
-              </a:rPr>
-              <a:t>L * </a:t>
+              <a:rPr lang="en-US" altLang="ko-KR">
+                <a:solidFill>
+                  <a:schemeClr val="tx1"/>
+                </a:solidFill>
+              </a:rPr>
+              <a:t>L / </a:t>
             </a:r>
             <a:r>
               <a:rPr lang="ko-KR" altLang="en-US" dirty="0">
